--- a/dist/초4/수학/도형/초4_수학_도형_05_여러가지사각형_학생용.pptx
+++ b/dist/초4/수학/도형/초4_수학_도형_05_여러가지사각형_학생용.pptx
@@ -120,13 +120,13 @@
   <p:extLst>
     <p:ext uri="{521415D9-36F7-43E2-AB2F-B90AF26B5E84}">
       <p14:sectionLst xmlns:p14="http://schemas.microsoft.com/office/powerpoint/2010/main">
-        <p14:section name="도입" id="{78cac7a3-c13b-c784-7dad-75be5c3ac8a4}">
+        <p14:section name="도입" id="{c1fe984b-6f06-1184-42c7-2d19aae0b1da}">
           <p14:sldIdLst>
             <p14:sldId id="256"/>
             <p14:sldId id="257"/>
           </p14:sldIdLst>
         </p14:section>
-        <p14:section name="개념" id="{dd33e7c2-d671-5a76-e21b-1f606b3922a9}">
+        <p14:section name="개념" id="{0994f7b0-18e1-d50b-6bfc-d85d13a6a677}">
           <p14:sldIdLst>
             <p14:sldId id="258"/>
             <p14:sldId id="259"/>
@@ -135,31 +135,31 @@
             <p14:sldId id="263"/>
           </p14:sldIdLst>
         </p14:section>
-        <p14:section name="연습" id="{84cf4ca8-8c25-5359-b61d-eda886d6cffd}">
+        <p14:section name="연습" id="{3654c996-095a-59a7-b9a5-b6760f24970e}">
           <p14:sldIdLst>
             <p14:sldId id="261"/>
             <p14:sldId id="264"/>
             <p14:sldId id="265"/>
           </p14:sldIdLst>
         </p14:section>
-        <p14:section name="개념" id="{95486bc5-4a27-8ef9-9b7b-81af8482bde3}">
+        <p14:section name="개념" id="{e711b63a-871b-75b3-fb0b-7512d38b25ea}">
           <p14:sldIdLst/>
         </p14:section>
-        <p14:section name="연습" id="{d52dfd31-78f0-24cd-6858-e9dad26960bd}">
+        <p14:section name="연습" id="{a0fcb551-2ab6-fa5c-bacd-69f8cfcea5e2}">
           <p14:sldIdLst/>
         </p14:section>
-        <p14:section name="확인" id="{d344f8e6-8e7f-2363-2d63-708ee0ceafd8}">
+        <p14:section name="확인" id="{1a61ab37-be4f-f23e-37d1-cb1c2409d881}">
           <p14:sldIdLst>
             <p14:sldId id="266"/>
             <p14:sldId id="267"/>
           </p14:sldIdLst>
         </p14:section>
-        <p14:section name="정리" id="{69e8f209-8b01-1cbb-f606-f2aa60149c86}">
+        <p14:section name="정리" id="{f1c9f5de-fa11-ba56-cb2d-4a27c6da8fc6}">
           <p14:sldIdLst>
             <p14:sldId id="268"/>
           </p14:sldIdLst>
         </p14:section>
-        <p14:section name="보충" id="{e140ccc1-a366-f920-ed17-86b0429fc44f}">
+        <p14:section name="보충" id="{542ba2bc-e39a-e5ea-396a-57636de3ab7e}">
           <p14:sldIdLst>
             <p14:sldId id="269"/>
           </p14:sldIdLst>
@@ -3870,7 +3870,7 @@
                 <a:ea typeface="맑은 고딕" pitchFamily="34" charset="-122"/>
                 <a:cs typeface="맑은 고딕" pitchFamily="34" charset="-120"/>
               </a:rPr>
-              <a:t>사다리꼴예요.</a:t>
+              <a:t>사다리꼴이에요.</a:t>
             </a:r>
             <a:endParaRPr lang="ko-KR" sz="3000" dirty="0"/>
           </a:p>
@@ -3973,7 +3973,7 @@
                 <a:ea typeface="맑은 고딕" pitchFamily="34" charset="-122"/>
                 <a:cs typeface="맑은 고딕" pitchFamily="34" charset="-120"/>
               </a:rPr>
-              <a:t>정사각형예요.</a:t>
+              <a:t>정사각형이에요.</a:t>
             </a:r>
             <a:endParaRPr lang="ko-KR" sz="3000" dirty="0"/>
           </a:p>
@@ -4076,7 +4076,7 @@
                 <a:ea typeface="맑은 고딕" pitchFamily="34" charset="-122"/>
                 <a:cs typeface="맑은 고딕" pitchFamily="34" charset="-120"/>
               </a:rPr>
-              <a:t>평행사변형예요.</a:t>
+              <a:t>평행사변형이에요.</a:t>
             </a:r>
             <a:endParaRPr lang="ko-KR" sz="3000" dirty="0"/>
           </a:p>
@@ -4179,7 +4179,7 @@
                 <a:ea typeface="맑은 고딕" pitchFamily="34" charset="-122"/>
                 <a:cs typeface="맑은 고딕" pitchFamily="34" charset="-120"/>
               </a:rPr>
-              <a:t>평행사변형예요.</a:t>
+              <a:t>평행사변형이에요.</a:t>
             </a:r>
             <a:endParaRPr lang="ko-KR" sz="3000" dirty="0"/>
           </a:p>
